--- a/tasks/finalpool/pw-scholarly-trend-analysis-excel-ppt/groundtruth_workspace/Trend_Analysis_Presentation.pptx
+++ b/tasks/finalpool/pw-scholarly-trend-analysis-excel-ppt/groundtruth_workspace/Trend_Analysis_Presentation.pptx
@@ -7,6 +7,9 @@
   <p:sldIdLst>
     <p:sldId id="256" r:id="rId7"/>
     <p:sldId id="257" r:id="rId8"/>
+    <p:sldId id="258" r:id="rId9"/>
+    <p:sldId id="259" r:id="rId10"/>
+    <p:sldId id="260" r:id="rId11"/>
   </p:sldIdLst>
   <p:sldSz cx="9144000" cy="6858000" type="screen4x3"/>
   <p:notesSz cx="6858000" cy="9144000"/>
@@ -3124,11 +3127,7 @@
         <p:txBody>
           <a:bodyPr/>
           <a:lstStyle/>
-          <a:p>
-            <a:r>
-              <a:t>Research trends and citation analysis</a:t>
-            </a:r>
-          </a:p>
+          <a:p/>
         </p:txBody>
       </p:sp>
     </p:spTree>
@@ -3165,6 +3164,66 @@
           <a:lstStyle/>
           <a:p>
             <a:r>
+              <a:t>Methodology</a:t>
+            </a:r>
+          </a:p>
+        </p:txBody>
+      </p:sp>
+      <p:sp>
+        <p:nvSpPr>
+          <p:cNvPr id="3" name="Content Placeholder 2"/>
+          <p:cNvSpPr>
+            <a:spLocks noGrp="1"/>
+          </p:cNvSpPr>
+          <p:nvPr>
+            <p:ph idx="1"/>
+          </p:nvPr>
+        </p:nvSpPr>
+        <p:spPr/>
+        <p:txBody>
+          <a:bodyPr/>
+          <a:lstStyle/>
+          <a:p>
+            <a:r>
+              <a:t>Compared internal paper metrics against benchmark dataset extracted from the trend dashboard.</a:t>
+            </a:r>
+          </a:p>
+        </p:txBody>
+      </p:sp>
+    </p:spTree>
+  </p:cSld>
+  <p:clrMapOvr>
+    <a:masterClrMapping/>
+  </p:clrMapOvr>
+</p:sld>
+</file>
+
+<file path=ppt/slides/slide3.xml><?xml version="1.0" encoding="utf-8"?>
+<p:sld xmlns:a="http://schemas.openxmlformats.org/drawingml/2006/main" xmlns:p="http://schemas.openxmlformats.org/presentationml/2006/main" xmlns:r="http://schemas.openxmlformats.org/officeDocument/2006/relationships">
+  <p:cSld>
+    <p:spTree>
+      <p:nvGrpSpPr>
+        <p:cNvPr id="1" name=""/>
+        <p:cNvGrpSpPr/>
+        <p:nvPr/>
+      </p:nvGrpSpPr>
+      <p:grpSpPr/>
+      <p:sp>
+        <p:nvSpPr>
+          <p:cNvPr id="2" name="Title 1"/>
+          <p:cNvSpPr>
+            <a:spLocks noGrp="1"/>
+          </p:cNvSpPr>
+          <p:nvPr>
+            <p:ph type="title"/>
+          </p:nvPr>
+        </p:nvSpPr>
+        <p:spPr/>
+        <p:txBody>
+          <a:bodyPr/>
+          <a:lstStyle/>
+          <a:p>
+            <a:r>
               <a:t>Key Findings</a:t>
             </a:r>
           </a:p>
@@ -3186,7 +3245,147 @@
           <a:lstStyle/>
           <a:p>
             <a:r>
-              <a:t>Top research areas and emerging trends identified from scholarly database analysis.</a:t>
+              <a:t>Average citation gap relative to benchmark.</a:t>
+            </a:r>
+          </a:p>
+          <a:p>
+            <a:r>
+              <a:t>Top relevance scores cluster around recent topics.</a:t>
+            </a:r>
+          </a:p>
+          <a:p>
+            <a:r>
+              <a:t>Most papers fall within +/-1 of benchmark relevance score.</a:t>
+            </a:r>
+          </a:p>
+        </p:txBody>
+      </p:sp>
+    </p:spTree>
+  </p:cSld>
+  <p:clrMapOvr>
+    <a:masterClrMapping/>
+  </p:clrMapOvr>
+</p:sld>
+</file>
+
+<file path=ppt/slides/slide4.xml><?xml version="1.0" encoding="utf-8"?>
+<p:sld xmlns:a="http://schemas.openxmlformats.org/drawingml/2006/main" xmlns:p="http://schemas.openxmlformats.org/presentationml/2006/main" xmlns:r="http://schemas.openxmlformats.org/officeDocument/2006/relationships">
+  <p:cSld>
+    <p:spTree>
+      <p:nvGrpSpPr>
+        <p:cNvPr id="1" name=""/>
+        <p:cNvGrpSpPr/>
+        <p:nvPr/>
+      </p:nvGrpSpPr>
+      <p:grpSpPr/>
+      <p:sp>
+        <p:nvSpPr>
+          <p:cNvPr id="2" name="Title 1"/>
+          <p:cNvSpPr>
+            <a:spLocks noGrp="1"/>
+          </p:cNvSpPr>
+          <p:nvPr>
+            <p:ph type="title"/>
+          </p:nvPr>
+        </p:nvSpPr>
+        <p:spPr/>
+        <p:txBody>
+          <a:bodyPr/>
+          <a:lstStyle/>
+          <a:p>
+            <a:r>
+              <a:t>Recommendations</a:t>
+            </a:r>
+          </a:p>
+        </p:txBody>
+      </p:sp>
+      <p:sp>
+        <p:nvSpPr>
+          <p:cNvPr id="3" name="Content Placeholder 2"/>
+          <p:cNvSpPr>
+            <a:spLocks noGrp="1"/>
+          </p:cNvSpPr>
+          <p:nvPr>
+            <p:ph idx="1"/>
+          </p:nvPr>
+        </p:nvSpPr>
+        <p:spPr/>
+        <p:txBody>
+          <a:bodyPr/>
+          <a:lstStyle/>
+          <a:p>
+            <a:r>
+              <a:t>Increase visibility of high-citation papers in upcoming briefings.</a:t>
+            </a:r>
+          </a:p>
+          <a:p>
+            <a:r>
+              <a:t>Schedule follow-up review of low-relevance papers.</a:t>
+            </a:r>
+          </a:p>
+          <a:p>
+            <a:r>
+              <a:t>Prioritise outreach for trending topics.</a:t>
+            </a:r>
+          </a:p>
+        </p:txBody>
+      </p:sp>
+    </p:spTree>
+  </p:cSld>
+  <p:clrMapOvr>
+    <a:masterClrMapping/>
+  </p:clrMapOvr>
+</p:sld>
+</file>
+
+<file path=ppt/slides/slide5.xml><?xml version="1.0" encoding="utf-8"?>
+<p:sld xmlns:a="http://schemas.openxmlformats.org/drawingml/2006/main" xmlns:p="http://schemas.openxmlformats.org/presentationml/2006/main" xmlns:r="http://schemas.openxmlformats.org/officeDocument/2006/relationships">
+  <p:cSld>
+    <p:spTree>
+      <p:nvGrpSpPr>
+        <p:cNvPr id="1" name=""/>
+        <p:cNvGrpSpPr/>
+        <p:nvPr/>
+      </p:nvGrpSpPr>
+      <p:grpSpPr/>
+      <p:sp>
+        <p:nvSpPr>
+          <p:cNvPr id="2" name="Title 1"/>
+          <p:cNvSpPr>
+            <a:spLocks noGrp="1"/>
+          </p:cNvSpPr>
+          <p:nvPr>
+            <p:ph type="title"/>
+          </p:nvPr>
+        </p:nvSpPr>
+        <p:spPr/>
+        <p:txBody>
+          <a:bodyPr/>
+          <a:lstStyle/>
+          <a:p>
+            <a:r>
+              <a:t>Next Steps</a:t>
+            </a:r>
+          </a:p>
+        </p:txBody>
+      </p:sp>
+      <p:sp>
+        <p:nvSpPr>
+          <p:cNvPr id="3" name="Content Placeholder 2"/>
+          <p:cNvSpPr>
+            <a:spLocks noGrp="1"/>
+          </p:cNvSpPr>
+          <p:nvPr>
+            <p:ph idx="1"/>
+          </p:nvPr>
+        </p:nvSpPr>
+        <p:spPr/>
+        <p:txBody>
+          <a:bodyPr/>
+          <a:lstStyle/>
+          <a:p>
+            <a:r>
+              <a:t>Repeat analysis quarterly and update benchmark snapshot.</a:t>
             </a:r>
           </a:p>
         </p:txBody>
